--- a/decks/day4/module-6-failure-modes.pptx
+++ b/decks/day4/module-6-failure-modes.pptx
@@ -13,9 +13,10 @@
     <p:sldId id="261" r:id="rId7"/>
     <p:sldId id="262" r:id="rId8"/>
     <p:sldId id="263" r:id="rId9"/>
+    <p:sldId id="264" r:id="rId10"/>
   </p:sldIdLst>
   <p:notesMasterIdLst>
-    <p:notesMasterId r:id="rId10"/>
+    <p:notesMasterId r:id="rId11"/>
   </p:notesMasterIdLst>
   <p:sldSz cx="9144000" cy="5143500"/>
   <p:notesSz cx="5143500" cy="9144000"/>
@@ -687,9 +688,8 @@
           <a:p>
             <a:r>
               <a:rPr lang="en-US" dirty="0"/>
-              <a:t>• This is the distinction to land clearly: AgentLoopMiddleware only bounds one agent looping on itself. A conditional edge routing between two different executors (Module 3's Critic-to-Planner example) has no automatic iteration cap — you build one, using workflow state.
-• GROUNDING SOURCE: https://learn.microsoft.com/en-us/agent-framework/agents/looping
-• GROUNDING SOURCE: https://learn.microsoft.com/en-us/agent-framework/concepts/workflows/state</a:t>
+              <a:t>• Placeholder marker slide — the runbook has full narration, setup, and fallback plan. Adapted from the official agent_loop_middleware_refinement.py SDK sample: same agent and should_continue/record_feedback/fresh_context mechanics, run as two cases (BOUNDED vs RUNAWAY) instead of one so the safety cap catching a failed completion condition is observed live.
+• GROUNDING SOURCE: https://learn.microsoft.com/en-us/agent-framework/agents/looping</a:t>
             </a:r>
             <a:endParaRPr lang="en-US" dirty="0"/>
           </a:p>
@@ -777,8 +777,9 @@
           <a:p>
             <a:r>
               <a:rPr lang="en-US" dirty="0"/>
-              <a:t>• "Tool storm" is this workshop's own descriptive term for excessive/redundant tool calls, not verbatim framework vocabulary — flag that honestly. The detection mechanism (Tool Selection, Tool Call Accuracy) is real and grounded from Module 5.
-• GROUNDING SOURCE: https://learn.microsoft.com/azure/foundry/concepts/evaluation-evaluators/agent-evaluators</a:t>
+              <a:t>• This is the distinction to land clearly: AgentLoopMiddleware only bounds one agent looping on itself. A conditional edge routing between two different executors (Module 3's Critic-to-Planner example) has no automatic iteration cap — you build one, using workflow state.
+• GROUNDING SOURCE: https://learn.microsoft.com/en-us/agent-framework/agents/looping
+• GROUNDING SOURCE: https://learn.microsoft.com/en-us/agent-framework/concepts/workflows/state</a:t>
             </a:r>
             <a:endParaRPr lang="en-US" dirty="0"/>
           </a:p>
@@ -866,9 +867,8 @@
           <a:p>
             <a:r>
               <a:rPr lang="en-US" dirty="0"/>
-              <a:t>• Ties directly to Module 5's cost-per-successful-outcome metric and Module 2's Magentic guardrail parameters — this module is where those two get framed explicitly as a failure mode + mitigation pair.
-• GROUNDING SOURCE: https://learn.microsoft.com/en-us/agent-framework/agents/observability
-• GROUNDING SOURCE: https://learn.microsoft.com/en-us/agent-framework/workflows/orchestrations/magentic</a:t>
+              <a:t>• "Tool storm" is this workshop's own descriptive term for excessive/redundant tool calls, not verbatim framework vocabulary — flag that honestly. The detection mechanism (Tool Selection, Tool Call Accuracy) is real and grounded from Module 5.
+• GROUNDING SOURCE: https://learn.microsoft.com/azure/foundry/concepts/evaluation-evaluators/agent-evaluators</a:t>
             </a:r>
             <a:endParaRPr lang="en-US" dirty="0"/>
           </a:p>
@@ -956,8 +956,9 @@
           <a:p>
             <a:r>
               <a:rPr lang="en-US" dirty="0"/>
-              <a:t>• "Quality drift" is also this workshop's own term for a golden-set pass rate degrading run over run or after a change — flag that honestly, same as tool storm. The detection mechanism (num_repetitions, eval-change-re-eval loop) is Module 5's, real and grounded.
-• GROUNDING SOURCE: https://learn.microsoft.com/en-us/agent-framework/agents/evaluation</a:t>
+              <a:t>• Ties directly to Module 5's cost-per-successful-outcome metric and Module 2's Magentic guardrail parameters — this module is where those two get framed explicitly as a failure mode + mitigation pair.
+• GROUNDING SOURCE: https://learn.microsoft.com/en-us/agent-framework/agents/observability
+• GROUNDING SOURCE: https://learn.microsoft.com/en-us/agent-framework/workflows/orchestrations/magentic</a:t>
             </a:r>
             <a:endParaRPr lang="en-US" dirty="0"/>
           </a:p>
@@ -1045,9 +1046,7 @@
           <a:p>
             <a:r>
               <a:rPr lang="en-US" dirty="0"/>
-              <a:t>• This summary table is this workshop's own synthesis of the mechanisms above — not a single verbatim framework table. Use it as the module's closing reference slide.
-• GROUNDING SOURCE: https://learn.microsoft.com/en-us/agent-framework/agents/looping
-• GROUNDING SOURCE: https://learn.microsoft.com/en-us/agent-framework/agents/observability
+              <a:t>• "Quality drift" is also this workshop's own term for a golden-set pass rate degrading run over run or after a change — flag that honestly, same as tool storm. The detection mechanism (num_repetitions, eval-change-re-eval loop) is Module 5's, real and grounded.
 • GROUNDING SOURCE: https://learn.microsoft.com/en-us/agent-framework/agents/evaluation</a:t>
             </a:r>
             <a:endParaRPr lang="en-US" dirty="0"/>
@@ -1136,8 +1135,10 @@
           <a:p>
             <a:r>
               <a:rPr lang="en-US" dirty="0"/>
-              <a:t>• Ask attendees to name the guardrail their own lab workflow needs before they'd trust it in production. Expected answer: a bounded counter on the Critic-to-Planner loop, since that's the one failure mode this exact lab can trigger on its own.
-• GROUNDING SOURCE: https://learn.microsoft.com/en-us/agent-framework/agents/looping</a:t>
+              <a:t>• This summary table is this workshop's own synthesis of the mechanisms above — not a single verbatim framework table. Use it as the module's closing reference slide.
+• GROUNDING SOURCE: https://learn.microsoft.com/en-us/agent-framework/agents/looping
+• GROUNDING SOURCE: https://learn.microsoft.com/en-us/agent-framework/agents/observability
+• GROUNDING SOURCE: https://learn.microsoft.com/en-us/agent-framework/agents/evaluation</a:t>
             </a:r>
             <a:endParaRPr lang="en-US" dirty="0"/>
           </a:p>
@@ -1161,6 +1162,95 @@
             <a:fld id="{F7021451-1387-4CA6-816F-3879F97B5CBC}" type="slidenum">
               <a:rPr lang="en-US"/>
               <a:t>8</a:t>
+            </a:fld>
+            <a:endParaRPr lang="en-US"/>
+          </a:p>
+        </p:txBody>
+      </p:sp>
+    </p:spTree>
+    <p:extLst>
+      <p:ext uri="{BB962C8B-B14F-4D97-AF65-F5344CB8AC3E}">
+        <p14:creationId xmlns:p14="http://schemas.microsoft.com/office/powerpoint/2010/main" val="1024086991"/>
+      </p:ext>
+    </p:extLst>
+  </p:cSld>
+  <p:clrMapOvr>
+    <a:masterClrMapping/>
+  </p:clrMapOvr>
+</p:notes>
+</file>
+
+<file path=ppt/notesSlides/notesSlide9.xml><?xml version="1.0" encoding="utf-8"?>
+<p:notes xmlns:a="http://schemas.openxmlformats.org/drawingml/2006/main" xmlns:r="http://schemas.openxmlformats.org/officeDocument/2006/relationships" xmlns:p="http://schemas.openxmlformats.org/presentationml/2006/main">
+  <p:cSld>
+    <p:spTree>
+      <p:nvGrpSpPr>
+        <p:cNvPr id="1" name=""/>
+        <p:cNvGrpSpPr/>
+        <p:nvPr/>
+      </p:nvGrpSpPr>
+      <p:grpSpPr>
+        <a:xfrm>
+          <a:off x="0" y="0"/>
+          <a:ext cx="0" cy="0"/>
+          <a:chOff x="0" y="0"/>
+          <a:chExt cx="0" cy="0"/>
+        </a:xfrm>
+      </p:grpSpPr>
+      <p:sp>
+        <p:nvSpPr>
+          <p:cNvPr id="2" name="Slide Image Placeholder 1"/>
+          <p:cNvSpPr>
+            <a:spLocks noGrp="1" noRot="1" noChangeAspect="1"/>
+          </p:cNvSpPr>
+          <p:nvPr>
+            <p:ph type="sldImg"/>
+          </p:nvPr>
+        </p:nvSpPr>
+        <p:spPr/>
+      </p:sp>
+      <p:sp>
+        <p:nvSpPr>
+          <p:cNvPr id="3" name="Notes Placeholder 2"/>
+          <p:cNvSpPr>
+            <a:spLocks noGrp="1"/>
+          </p:cNvSpPr>
+          <p:nvPr>
+            <p:ph type="body" idx="1"/>
+          </p:nvPr>
+        </p:nvSpPr>
+        <p:spPr/>
+        <p:txBody>
+          <a:bodyPr/>
+          <a:lstStyle/>
+          <a:p>
+            <a:r>
+              <a:rPr lang="en-US" dirty="0"/>
+              <a:t>• Ask attendees to name the guardrail their own lab workflow needs before they'd trust it in production. Expected answer: a bounded counter on the Critic-to-Planner loop, since that's the one failure mode this exact lab can trigger on its own.
+• GROUNDING SOURCE: https://learn.microsoft.com/en-us/agent-framework/agents/looping</a:t>
+            </a:r>
+            <a:endParaRPr lang="en-US" dirty="0"/>
+          </a:p>
+        </p:txBody>
+      </p:sp>
+      <p:sp>
+        <p:nvSpPr>
+          <p:cNvPr id="4" name="Slide Number Placeholder 3"/>
+          <p:cNvSpPr>
+            <a:spLocks noGrp="1"/>
+          </p:cNvSpPr>
+          <p:nvPr>
+            <p:ph type="sldNum" sz="quarter" idx="10"/>
+          </p:nvPr>
+        </p:nvSpPr>
+        <p:spPr/>
+        <p:txBody>
+          <a:bodyPr/>
+          <a:lstStyle/>
+          <a:p>
+            <a:fld id="{F7021451-1387-4CA6-816F-3879F97B5CBC}" type="slidenum">
+              <a:rPr lang="en-US"/>
+              <a:t>9</a:t>
             </a:fld>
             <a:endParaRPr lang="en-US"/>
           </a:p>
@@ -2029,7 +2119,7 @@
     <p:bg>
       <p:bgPr>
         <a:solidFill>
-          <a:srgbClr val="FFFFFF"/>
+          <a:srgbClr val="CADCFC"/>
         </a:solidFill>
       </p:bgPr>
     </p:bg>
@@ -2056,7 +2146,7 @@
         <p:spPr>
           <a:xfrm>
             <a:off x="0" y="0"/>
-            <a:ext cx="54864" cy="5143500"/>
+            <a:ext cx="146304" cy="5143500"/>
           </a:xfrm>
           <a:prstGeom prst="rect">
             <a:avLst/>
@@ -2075,8 +2165,8 @@
         </p:nvSpPr>
         <p:spPr>
           <a:xfrm>
-            <a:off x="5486400" y="256032"/>
-            <a:ext cx="3337560" cy="228600"/>
+            <a:off x="5669280" y="274320"/>
+            <a:ext cx="3291840" cy="274320"/>
           </a:xfrm>
           <a:prstGeom prst="rect">
             <a:avLst/>
@@ -2085,16 +2175,14 @@
           <a:ln/>
         </p:spPr>
         <p:txBody>
-          <a:bodyPr wrap="square" lIns="0" tIns="0" rIns="0" bIns="0" rtlCol="0" anchor="ctr">
-            <a:normAutofit/>
-          </a:bodyPr>
+          <a:bodyPr wrap="square" lIns="0" tIns="0" rIns="0" bIns="0" rtlCol="0" anchor="ctr"/>
           <a:lstStyle/>
           <a:p>
             <a:pPr algn="r" indent="0" marL="0">
               <a:buNone/>
             </a:pPr>
             <a:r>
-              <a:rPr lang="en-US" sz="950" dirty="0">
+              <a:rPr lang="en-US" sz="1000" dirty="0">
                 <a:solidFill>
                   <a:srgbClr val="6B7280"/>
                 </a:solidFill>
@@ -2102,9 +2190,9 @@
                 <a:ea typeface="Calibri" pitchFamily="34" charset="-122"/>
                 <a:cs typeface="Calibri" pitchFamily="34" charset="-120"/>
               </a:rPr>
-              <a:t>Day 4 · Module 6</a:t>
-            </a:r>
-            <a:endParaRPr lang="en-US" sz="950" dirty="0"/>
+              <a:t>Day 4 · Module 6 · Demo</a:t>
+            </a:r>
+            <a:endParaRPr lang="en-US" sz="1000" dirty="0"/>
           </a:p>
         </p:txBody>
       </p:sp>
@@ -2116,8 +2204,8 @@
         </p:nvSpPr>
         <p:spPr>
           <a:xfrm>
-            <a:off x="365760" y="310896"/>
-            <a:ext cx="6583680" cy="603504"/>
+            <a:off x="548640" y="1051560"/>
+            <a:ext cx="5486400" cy="502920"/>
           </a:xfrm>
           <a:prstGeom prst="rect">
             <a:avLst/>
@@ -2126,16 +2214,14 @@
           <a:ln/>
         </p:spPr>
         <p:txBody>
-          <a:bodyPr wrap="square" lIns="0" tIns="0" rIns="0" bIns="0" rtlCol="0" anchor="ctr">
-            <a:normAutofit/>
-          </a:bodyPr>
+          <a:bodyPr wrap="square" lIns="0" tIns="0" rIns="0" bIns="0" rtlCol="0" anchor="ctr"/>
           <a:lstStyle/>
           <a:p>
             <a:pPr indent="0" marL="0">
               <a:buNone/>
             </a:pPr>
             <a:r>
-              <a:rPr lang="en-US" sz="2800" b="1" dirty="0">
+              <a:rPr lang="en-US" sz="3200" b="1" spc="800" kern="0" dirty="0">
                 <a:solidFill>
                   <a:srgbClr val="1E2761"/>
                 </a:solidFill>
@@ -2143,47 +2229,22 @@
                 <a:ea typeface="Calibri" pitchFamily="34" charset="-122"/>
                 <a:cs typeface="Calibri" pitchFamily="34" charset="-120"/>
               </a:rPr>
-              <a:t>Bounding a workflow-level loop</a:t>
-            </a:r>
-            <a:endParaRPr lang="en-US" sz="2800" dirty="0"/>
-          </a:p>
-        </p:txBody>
-      </p:sp>
-      <p:sp>
-        <p:nvSpPr>
-          <p:cNvPr id="5" name="Shape 3"/>
-          <p:cNvSpPr/>
-          <p:nvPr/>
-        </p:nvSpPr>
-        <p:spPr>
-          <a:xfrm>
-            <a:off x="365760" y="1078992"/>
-            <a:ext cx="4114800" cy="3493008"/>
-          </a:xfrm>
-          <a:prstGeom prst="roundRect">
-            <a:avLst/>
-          </a:prstGeom>
-          <a:solidFill>
-            <a:srgbClr val="F3F4F6"/>
-          </a:solidFill>
-          <a:ln w="11430">
-            <a:solidFill>
-              <a:srgbClr val="D1D5DB"/>
-            </a:solidFill>
-            <a:prstDash val="solid"/>
-          </a:ln>
-        </p:spPr>
-      </p:sp>
-      <p:sp>
-        <p:nvSpPr>
-          <p:cNvPr id="6" name="Text 4"/>
-          <p:cNvSpPr/>
-          <p:nvPr/>
-        </p:nvSpPr>
-        <p:spPr>
-          <a:xfrm>
-            <a:off x="566928" y="1298448"/>
-            <a:ext cx="3712464" cy="411480"/>
+              <a:t>DEMO</a:t>
+            </a:r>
+            <a:endParaRPr lang="en-US" sz="3200" dirty="0"/>
+          </a:p>
+        </p:txBody>
+      </p:sp>
+      <p:sp>
+        <p:nvSpPr>
+          <p:cNvPr id="5" name="Text 3"/>
+          <p:cNvSpPr/>
+          <p:nvPr/>
+        </p:nvSpPr>
+        <p:spPr>
+          <a:xfrm>
+            <a:off x="548640" y="1691640"/>
+            <a:ext cx="8046720" cy="914400"/>
           </a:xfrm>
           <a:prstGeom prst="rect">
             <a:avLst/>
@@ -2192,16 +2253,14 @@
           <a:ln/>
         </p:spPr>
         <p:txBody>
-          <a:bodyPr wrap="square" lIns="0" tIns="0" rIns="0" bIns="0" rtlCol="0" anchor="ctr">
-            <a:normAutofit/>
-          </a:bodyPr>
+          <a:bodyPr wrap="square" lIns="0" tIns="0" rIns="0" bIns="0" rtlCol="0" anchor="ctr"/>
           <a:lstStyle/>
           <a:p>
             <a:pPr indent="0" marL="0">
               <a:buNone/>
             </a:pPr>
             <a:r>
-              <a:rPr lang="en-US" sz="2000" b="1" dirty="0">
+              <a:rPr lang="en-US" sz="3000" b="1" dirty="0">
                 <a:solidFill>
                   <a:srgbClr val="1E2761"/>
                 </a:solidFill>
@@ -2209,22 +2268,22 @@
                 <a:ea typeface="Calibri" pitchFamily="34" charset="-122"/>
                 <a:cs typeface="Calibri" pitchFamily="34" charset="-120"/>
               </a:rPr>
-              <a:t>Single-agent loop (AgentLoopMiddleware)</a:t>
-            </a:r>
-            <a:endParaRPr lang="en-US" sz="2000" dirty="0"/>
-          </a:p>
-        </p:txBody>
-      </p:sp>
-      <p:sp>
-        <p:nvSpPr>
-          <p:cNvPr id="7" name="Text 5"/>
-          <p:cNvSpPr/>
-          <p:nvPr/>
-        </p:nvSpPr>
-        <p:spPr>
-          <a:xfrm>
-            <a:off x="594360" y="1828800"/>
-            <a:ext cx="3639312" cy="2395728"/>
+              <a:t>Bound the loop (Option A: predicate + max_iterations, no judge)</a:t>
+            </a:r>
+            <a:endParaRPr lang="en-US" sz="3000" dirty="0"/>
+          </a:p>
+        </p:txBody>
+      </p:sp>
+      <p:sp>
+        <p:nvSpPr>
+          <p:cNvPr id="6" name="Text 4"/>
+          <p:cNvSpPr/>
+          <p:nvPr/>
+        </p:nvSpPr>
+        <p:spPr>
+          <a:xfrm>
+            <a:off x="6583680" y="1051560"/>
+            <a:ext cx="2194560" cy="502920"/>
           </a:xfrm>
           <a:prstGeom prst="rect">
             <a:avLst/>
@@ -2233,17 +2292,56 @@
           <a:ln/>
         </p:spPr>
         <p:txBody>
-          <a:bodyPr wrap="square" lIns="381" tIns="381" rIns="381" bIns="381" rtlCol="0" anchor="ctr">
-            <a:normAutofit/>
-          </a:bodyPr>
-          <a:lstStyle/>
-          <a:p>
-            <a:pPr marL="342900" indent="-342900">
-              <a:buSzPct val="100000"/>
-              <a:buChar char="•"/>
+          <a:bodyPr wrap="square" lIns="0" tIns="0" rIns="0" bIns="0" rtlCol="0" anchor="ctr"/>
+          <a:lstStyle/>
+          <a:p>
+            <a:pPr algn="r" indent="0" marL="0">
+              <a:buNone/>
             </a:pPr>
             <a:r>
-              <a:rPr lang="en-US" sz="1300" dirty="0">
+              <a:rPr lang="en-US" sz="1800" i="1" dirty="0">
+                <a:solidFill>
+                  <a:srgbClr val="6B7280"/>
+                </a:solidFill>
+                <a:latin typeface="Calibri" pitchFamily="34" charset="0"/>
+                <a:ea typeface="Calibri" pitchFamily="34" charset="-122"/>
+                <a:cs typeface="Calibri" pitchFamily="34" charset="-120"/>
+              </a:rPr>
+              <a:t>~4 min</a:t>
+            </a:r>
+            <a:endParaRPr lang="en-US" sz="1800" dirty="0"/>
+          </a:p>
+        </p:txBody>
+      </p:sp>
+      <p:sp>
+        <p:nvSpPr>
+          <p:cNvPr id="7" name="Text 5"/>
+          <p:cNvSpPr/>
+          <p:nvPr/>
+        </p:nvSpPr>
+        <p:spPr>
+          <a:xfrm>
+            <a:off x="548640" y="2788920"/>
+            <a:ext cx="8046720" cy="1371600"/>
+          </a:xfrm>
+          <a:prstGeom prst="rect">
+            <a:avLst/>
+          </a:prstGeom>
+          <a:noFill/>
+          <a:ln/>
+        </p:spPr>
+        <p:txBody>
+          <a:bodyPr wrap="square" lIns="0" tIns="0" rIns="0" bIns="0" rtlCol="0" anchor="ctr"/>
+          <a:lstStyle/>
+          <a:p>
+            <a:pPr indent="0" marL="0">
+              <a:spcAft>
+                <a:spcPts val="600"/>
+              </a:spcAft>
+              <a:buNone/>
+            </a:pPr>
+            <a:r>
+              <a:rPr lang="en-US" sz="1600" dirty="0">
                 <a:solidFill>
                   <a:srgbClr val="212121"/>
                 </a:solidFill>
@@ -2251,195 +2349,54 @@
                 <a:ea typeface="Calibri" pitchFamily="34" charset="-122"/>
                 <a:cs typeface="Calibri" pitchFamily="34" charset="-120"/>
               </a:rPr>
-              <a:t>Single-agent loop (AgentLoopMiddleware)</a:t>
-            </a:r>
-            <a:endParaRPr lang="en-US" sz="1300" dirty="0"/>
-          </a:p>
-          <a:p>
-            <a:pPr marL="342900" indent="-342900">
-              <a:buSzPct val="100000"/>
-              <a:buChar char="•"/>
+              <a:t>The SAME agent and instructions run through two should_continue predicates. BOUNDED checks the marker the agent was actually told to emit — the loop stops on its own, under the cap. RUNAWAY checks a one-word typo of that marker (COMPLETED vs COMPLETE) that can never appear verbatim — a real bug shape where should_continue can never return False on its own, so max_iterations is the only thing that stops it. That's this slide's quoted warning, reproduced as code: "a completion condition can fail."</a:t>
+            </a:r>
+            <a:endParaRPr lang="en-US" sz="1600" dirty="0"/>
+          </a:p>
+        </p:txBody>
+      </p:sp>
+      <p:sp>
+        <p:nvSpPr>
+          <p:cNvPr id="8" name="Text 6"/>
+          <p:cNvSpPr/>
+          <p:nvPr/>
+        </p:nvSpPr>
+        <p:spPr>
+          <a:xfrm>
+            <a:off x="548640" y="4434840"/>
+            <a:ext cx="8046720" cy="320040"/>
+          </a:xfrm>
+          <a:prstGeom prst="rect">
+            <a:avLst/>
+          </a:prstGeom>
+          <a:noFill/>
+          <a:ln/>
+        </p:spPr>
+        <p:txBody>
+          <a:bodyPr wrap="square" lIns="0" tIns="0" rIns="0" bIns="0" rtlCol="0" anchor="ctr"/>
+          <a:lstStyle/>
+          <a:p>
+            <a:pPr indent="0" marL="0">
+              <a:buNone/>
             </a:pPr>
             <a:r>
-              <a:rPr lang="en-US" sz="1300" dirty="0">
+              <a:rPr lang="en-US" sz="1100" i="1" dirty="0">
                 <a:solidFill>
-                  <a:srgbClr val="212121"/>
+                  <a:srgbClr val="6B7280"/>
                 </a:solidFill>
                 <a:latin typeface="Calibri" pitchFamily="34" charset="0"/>
                 <a:ea typeface="Calibri" pitchFamily="34" charset="-122"/>
                 <a:cs typeface="Calibri" pitchFamily="34" charset="-120"/>
               </a:rPr>
-              <a:t>One agent, re-invoked on itself</a:t>
-            </a:r>
-            <a:endParaRPr lang="en-US" sz="1300" dirty="0"/>
-          </a:p>
-          <a:p>
-            <a:pPr marL="342900" indent="-342900">
-              <a:buSzPct val="100000"/>
-              <a:buChar char="•"/>
-            </a:pPr>
-            <a:r>
-              <a:rPr lang="en-US" sz="1300" dirty="0">
-                <a:solidFill>
-                  <a:srgbClr val="212121"/>
-                </a:solidFill>
-                <a:latin typeface="Calibri" pitchFamily="34" charset="0"/>
-                <a:ea typeface="Calibri" pitchFamily="34" charset="-122"/>
-                <a:cs typeface="Calibri" pitchFamily="34" charset="-120"/>
-              </a:rPr>
-              <a:t>max_iterations is built in</a:t>
-            </a:r>
-            <a:endParaRPr lang="en-US" sz="1300" dirty="0"/>
-          </a:p>
-        </p:txBody>
-      </p:sp>
-      <p:sp>
-        <p:nvSpPr>
-          <p:cNvPr id="8" name="Shape 6"/>
-          <p:cNvSpPr/>
-          <p:nvPr/>
-        </p:nvSpPr>
-        <p:spPr>
-          <a:xfrm>
-            <a:off x="4663440" y="1078992"/>
-            <a:ext cx="4114800" cy="3493008"/>
-          </a:xfrm>
-          <a:prstGeom prst="roundRect">
-            <a:avLst/>
-          </a:prstGeom>
-          <a:solidFill>
-            <a:srgbClr val="CADCFC"/>
-          </a:solidFill>
-          <a:ln w="11430">
-            <a:solidFill>
-              <a:srgbClr val="1E2761"/>
-            </a:solidFill>
-            <a:prstDash val="solid"/>
-          </a:ln>
-        </p:spPr>
-      </p:sp>
-      <p:sp>
-        <p:nvSpPr>
-          <p:cNvPr id="9" name="Text 7"/>
-          <p:cNvSpPr/>
-          <p:nvPr/>
-        </p:nvSpPr>
-        <p:spPr>
-          <a:xfrm>
-            <a:off x="4864608" y="1298448"/>
-            <a:ext cx="3712464" cy="411480"/>
-          </a:xfrm>
-          <a:prstGeom prst="rect">
-            <a:avLst/>
-          </a:prstGeom>
-          <a:noFill/>
-          <a:ln/>
-        </p:spPr>
-        <p:txBody>
-          <a:bodyPr wrap="square" lIns="0" tIns="0" rIns="0" bIns="0" rtlCol="0" anchor="ctr">
-            <a:normAutofit/>
-          </a:bodyPr>
-          <a:lstStyle/>
-          <a:p>
-            <a:pPr indent="0" marL="0">
-              <a:buNone/>
-            </a:pPr>
-            <a:r>
-              <a:rPr lang="en-US" sz="2000" b="1" dirty="0">
-                <a:solidFill>
-                  <a:srgbClr val="1E2761"/>
-                </a:solidFill>
-                <a:latin typeface="Calibri" pitchFamily="34" charset="0"/>
-                <a:ea typeface="Calibri" pitchFamily="34" charset="-122"/>
-                <a:cs typeface="Calibri" pitchFamily="34" charset="-120"/>
-              </a:rPr>
-              <a:t>Workflow-graph loop-back (Module 3's conditional edge)</a:t>
-            </a:r>
-            <a:endParaRPr lang="en-US" sz="2000" dirty="0"/>
-          </a:p>
-        </p:txBody>
-      </p:sp>
-      <p:sp>
-        <p:nvSpPr>
-          <p:cNvPr id="10" name="Text 8"/>
-          <p:cNvSpPr/>
-          <p:nvPr/>
-        </p:nvSpPr>
-        <p:spPr>
-          <a:xfrm>
-            <a:off x="4892040" y="1828800"/>
-            <a:ext cx="3639312" cy="2395728"/>
-          </a:xfrm>
-          <a:prstGeom prst="rect">
-            <a:avLst/>
-          </a:prstGeom>
-          <a:noFill/>
-          <a:ln/>
-        </p:spPr>
-        <p:txBody>
-          <a:bodyPr wrap="square" lIns="381" tIns="381" rIns="381" bIns="381" rtlCol="0" anchor="ctr">
-            <a:normAutofit/>
-          </a:bodyPr>
-          <a:lstStyle/>
-          <a:p>
-            <a:pPr marL="342900" indent="-342900">
-              <a:buSzPct val="100000"/>
-              <a:buChar char="•"/>
-            </a:pPr>
-            <a:r>
-              <a:rPr lang="en-US" sz="1300" dirty="0">
-                <a:solidFill>
-                  <a:srgbClr val="212121"/>
-                </a:solidFill>
-                <a:latin typeface="Calibri" pitchFamily="34" charset="0"/>
-                <a:ea typeface="Calibri" pitchFamily="34" charset="-122"/>
-                <a:cs typeface="Calibri" pitchFamily="34" charset="-120"/>
-              </a:rPr>
-              <a:t>Workflow-graph loop-back (Module 3's conditional edge)</a:t>
-            </a:r>
-            <a:endParaRPr lang="en-US" sz="1300" dirty="0"/>
-          </a:p>
-          <a:p>
-            <a:pPr marL="342900" indent="-342900">
-              <a:buSzPct val="100000"/>
-              <a:buChar char="•"/>
-            </a:pPr>
-            <a:r>
-              <a:rPr lang="en-US" sz="1300" dirty="0">
-                <a:solidFill>
-                  <a:srgbClr val="212121"/>
-                </a:solidFill>
-                <a:latin typeface="Calibri" pitchFamily="34" charset="0"/>
-                <a:ea typeface="Calibri" pitchFamily="34" charset="-122"/>
-                <a:cs typeface="Calibri" pitchFamily="34" charset="-120"/>
-              </a:rPr>
-              <a:t>Two different executors — e.g., Critic routing back to Planner</a:t>
-            </a:r>
-            <a:endParaRPr lang="en-US" sz="1300" dirty="0"/>
-          </a:p>
-          <a:p>
-            <a:pPr marL="342900" indent="-342900">
-              <a:buSzPct val="100000"/>
-              <a:buChar char="•"/>
-            </a:pPr>
-            <a:r>
-              <a:rPr lang="en-US" sz="1300" dirty="0">
-                <a:solidFill>
-                  <a:srgbClr val="212121"/>
-                </a:solidFill>
-                <a:latin typeface="Calibri" pitchFamily="34" charset="0"/>
-                <a:ea typeface="Calibri" pitchFamily="34" charset="-122"/>
-                <a:cs typeface="Calibri" pitchFamily="34" charset="-120"/>
-              </a:rPr>
-              <a:t>No automatic cap — track your own counter in workflow state, check it in the condition function</a:t>
-            </a:r>
-            <a:endParaRPr lang="en-US" sz="1300" dirty="0"/>
-          </a:p>
-        </p:txBody>
-      </p:sp>
-      <p:sp>
-        <p:nvSpPr>
-          <p:cNvPr id="11" name="Shape 9"/>
+              <a:t>Runbook: demos/day4/module-6-demo-1-bound-the-loop.md</a:t>
+            </a:r>
+            <a:endParaRPr lang="en-US" sz="1100" dirty="0"/>
+          </a:p>
+        </p:txBody>
+      </p:sp>
+      <p:sp>
+        <p:nvSpPr>
+          <p:cNvPr id="9" name="Shape 7"/>
           <p:cNvSpPr/>
           <p:nvPr/>
         </p:nvSpPr>
@@ -2462,7 +2419,7 @@
       </p:sp>
       <p:sp>
         <p:nvSpPr>
-          <p:cNvPr id="12" name="Text 10"/>
+          <p:cNvPr id="10" name="Text 8"/>
           <p:cNvSpPr/>
           <p:nvPr/>
         </p:nvSpPr>
@@ -2495,7 +2452,7 @@
                 <a:ea typeface="Calibri" pitchFamily="34" charset="-122"/>
                 <a:cs typeface="Calibri" pitchFamily="34" charset="-120"/>
               </a:rPr>
-              <a:t>Source: https://learn.microsoft.com/en-us/agent-framework/agents/looping  ·  +1 in notes</a:t>
+              <a:t>Source: https://learn.microsoft.com/en-us/agent-framework/agents/looping</a:t>
             </a:r>
             <a:endParaRPr lang="en-US" sz="820" dirty="0"/>
           </a:p>
@@ -2629,7 +2586,7 @@
                 <a:ea typeface="Calibri" pitchFamily="34" charset="-122"/>
                 <a:cs typeface="Calibri" pitchFamily="34" charset="-120"/>
               </a:rPr>
-              <a:t>Tool storms</a:t>
+              <a:t>Bounding a workflow-level loop</a:t>
             </a:r>
             <a:endParaRPr lang="en-US" sz="2800" dirty="0"/>
           </a:p>
@@ -2637,14 +2594,39 @@
       </p:sp>
       <p:sp>
         <p:nvSpPr>
-          <p:cNvPr id="5" name="Text 3"/>
-          <p:cNvSpPr/>
-          <p:nvPr/>
-        </p:nvSpPr>
-        <p:spPr>
-          <a:xfrm>
-            <a:off x="502920" y="1170432"/>
-            <a:ext cx="7955280" cy="3520440"/>
+          <p:cNvPr id="5" name="Shape 3"/>
+          <p:cNvSpPr/>
+          <p:nvPr/>
+        </p:nvSpPr>
+        <p:spPr>
+          <a:xfrm>
+            <a:off x="365760" y="1078992"/>
+            <a:ext cx="4114800" cy="3493008"/>
+          </a:xfrm>
+          <a:prstGeom prst="roundRect">
+            <a:avLst/>
+          </a:prstGeom>
+          <a:solidFill>
+            <a:srgbClr val="F3F4F6"/>
+          </a:solidFill>
+          <a:ln w="11430">
+            <a:solidFill>
+              <a:srgbClr val="D1D5DB"/>
+            </a:solidFill>
+            <a:prstDash val="solid"/>
+          </a:ln>
+        </p:spPr>
+      </p:sp>
+      <p:sp>
+        <p:nvSpPr>
+          <p:cNvPr id="6" name="Text 4"/>
+          <p:cNvSpPr/>
+          <p:nvPr/>
+        </p:nvSpPr>
+        <p:spPr>
+          <a:xfrm>
+            <a:off x="566928" y="1298448"/>
+            <a:ext cx="3712464" cy="411480"/>
           </a:xfrm>
           <a:prstGeom prst="rect">
             <a:avLst/>
@@ -2653,20 +2635,58 @@
           <a:ln/>
         </p:spPr>
         <p:txBody>
-          <a:bodyPr wrap="square" lIns="0" tIns="0" rIns="0" bIns="0" rtlCol="0" anchor="t">
+          <a:bodyPr wrap="square" lIns="0" tIns="0" rIns="0" bIns="0" rtlCol="0" anchor="ctr">
             <a:normAutofit/>
           </a:bodyPr>
           <a:lstStyle/>
           <a:p>
+            <a:pPr indent="0" marL="0">
+              <a:buNone/>
+            </a:pPr>
+            <a:r>
+              <a:rPr lang="en-US" sz="2000" b="1" dirty="0">
+                <a:solidFill>
+                  <a:srgbClr val="1E2761"/>
+                </a:solidFill>
+                <a:latin typeface="Calibri" pitchFamily="34" charset="0"/>
+                <a:ea typeface="Calibri" pitchFamily="34" charset="-122"/>
+                <a:cs typeface="Calibri" pitchFamily="34" charset="-120"/>
+              </a:rPr>
+              <a:t>Single-agent loop (AgentLoopMiddleware)</a:t>
+            </a:r>
+            <a:endParaRPr lang="en-US" sz="2000" dirty="0"/>
+          </a:p>
+        </p:txBody>
+      </p:sp>
+      <p:sp>
+        <p:nvSpPr>
+          <p:cNvPr id="7" name="Text 5"/>
+          <p:cNvSpPr/>
+          <p:nvPr/>
+        </p:nvSpPr>
+        <p:spPr>
+          <a:xfrm>
+            <a:off x="594360" y="1828800"/>
+            <a:ext cx="3639312" cy="2395728"/>
+          </a:xfrm>
+          <a:prstGeom prst="rect">
+            <a:avLst/>
+          </a:prstGeom>
+          <a:noFill/>
+          <a:ln/>
+        </p:spPr>
+        <p:txBody>
+          <a:bodyPr wrap="square" lIns="381" tIns="381" rIns="381" bIns="381" rtlCol="0" anchor="ctr">
+            <a:normAutofit/>
+          </a:bodyPr>
+          <a:lstStyle/>
+          <a:p>
             <a:pPr marL="342900" indent="-342900">
-              <a:spcAft>
-                <a:spcPts val="1000"/>
-              </a:spcAft>
               <a:buSzPct val="100000"/>
               <a:buChar char="•"/>
             </a:pPr>
             <a:r>
-              <a:rPr lang="en-US" sz="1600" dirty="0">
+              <a:rPr lang="en-US" sz="1300" dirty="0">
                 <a:solidFill>
                   <a:srgbClr val="212121"/>
                 </a:solidFill>
@@ -2674,20 +2694,17 @@
                 <a:ea typeface="Calibri" pitchFamily="34" charset="-122"/>
                 <a:cs typeface="Calibri" pitchFamily="34" charset="-120"/>
               </a:rPr>
-              <a:t>Tool storm (this workshop's term, not framework vocabulary): an agent makes many more tool calls than the task needs — redundant lookups, retried calls that already succeeded, tool-calling in a loop with no progress</a:t>
-            </a:r>
-            <a:endParaRPr lang="en-US" sz="1600" dirty="0"/>
+              <a:t>Single-agent loop (AgentLoopMiddleware)</a:t>
+            </a:r>
+            <a:endParaRPr lang="en-US" sz="1300" dirty="0"/>
           </a:p>
           <a:p>
             <a:pPr marL="342900" indent="-342900">
-              <a:spcAft>
-                <a:spcPts val="1000"/>
-              </a:spcAft>
               <a:buSzPct val="100000"/>
               <a:buChar char="•"/>
             </a:pPr>
             <a:r>
-              <a:rPr lang="en-US" sz="1600" dirty="0">
+              <a:rPr lang="en-US" sz="1300" dirty="0">
                 <a:solidFill>
                   <a:srgbClr val="212121"/>
                 </a:solidFill>
@@ -2695,20 +2712,17 @@
                 <a:ea typeface="Calibri" pitchFamily="34" charset="-122"/>
                 <a:cs typeface="Calibri" pitchFamily="34" charset="-120"/>
               </a:rPr>
-              <a:t>Module 5's Tool Selection evaluator catches unnecessary tool calls directly; Tool Call Accuracy catches redundancy in the calls that were made</a:t>
-            </a:r>
-            <a:endParaRPr lang="en-US" sz="1600" dirty="0"/>
+              <a:t>One agent, re-invoked on itself</a:t>
+            </a:r>
+            <a:endParaRPr lang="en-US" sz="1300" dirty="0"/>
           </a:p>
           <a:p>
             <a:pPr marL="342900" indent="-342900">
-              <a:spcAft>
-                <a:spcPts val="1000"/>
-              </a:spcAft>
               <a:buSzPct val="100000"/>
               <a:buChar char="•"/>
             </a:pPr>
             <a:r>
-              <a:rPr lang="en-US" sz="1600" dirty="0">
+              <a:rPr lang="en-US" sz="1300" dirty="0">
                 <a:solidFill>
                   <a:srgbClr val="212121"/>
                 </a:solidFill>
@@ -2716,15 +2730,159 @@
                 <a:ea typeface="Calibri" pitchFamily="34" charset="-122"/>
                 <a:cs typeface="Calibri" pitchFamily="34" charset="-120"/>
               </a:rPr>
-              <a:t>A workflow multiplies this risk — a tool storm inside any one agent's turn also inflates every downstream cost metric</a:t>
-            </a:r>
-            <a:endParaRPr lang="en-US" sz="1600" dirty="0"/>
-          </a:p>
-        </p:txBody>
-      </p:sp>
-      <p:sp>
-        <p:nvSpPr>
-          <p:cNvPr id="6" name="Shape 4"/>
+              <a:t>max_iterations is built in</a:t>
+            </a:r>
+            <a:endParaRPr lang="en-US" sz="1300" dirty="0"/>
+          </a:p>
+        </p:txBody>
+      </p:sp>
+      <p:sp>
+        <p:nvSpPr>
+          <p:cNvPr id="8" name="Shape 6"/>
+          <p:cNvSpPr/>
+          <p:nvPr/>
+        </p:nvSpPr>
+        <p:spPr>
+          <a:xfrm>
+            <a:off x="4663440" y="1078992"/>
+            <a:ext cx="4114800" cy="3493008"/>
+          </a:xfrm>
+          <a:prstGeom prst="roundRect">
+            <a:avLst/>
+          </a:prstGeom>
+          <a:solidFill>
+            <a:srgbClr val="CADCFC"/>
+          </a:solidFill>
+          <a:ln w="11430">
+            <a:solidFill>
+              <a:srgbClr val="1E2761"/>
+            </a:solidFill>
+            <a:prstDash val="solid"/>
+          </a:ln>
+        </p:spPr>
+      </p:sp>
+      <p:sp>
+        <p:nvSpPr>
+          <p:cNvPr id="9" name="Text 7"/>
+          <p:cNvSpPr/>
+          <p:nvPr/>
+        </p:nvSpPr>
+        <p:spPr>
+          <a:xfrm>
+            <a:off x="4864608" y="1298448"/>
+            <a:ext cx="3712464" cy="411480"/>
+          </a:xfrm>
+          <a:prstGeom prst="rect">
+            <a:avLst/>
+          </a:prstGeom>
+          <a:noFill/>
+          <a:ln/>
+        </p:spPr>
+        <p:txBody>
+          <a:bodyPr wrap="square" lIns="0" tIns="0" rIns="0" bIns="0" rtlCol="0" anchor="ctr">
+            <a:normAutofit/>
+          </a:bodyPr>
+          <a:lstStyle/>
+          <a:p>
+            <a:pPr indent="0" marL="0">
+              <a:buNone/>
+            </a:pPr>
+            <a:r>
+              <a:rPr lang="en-US" sz="2000" b="1" dirty="0">
+                <a:solidFill>
+                  <a:srgbClr val="1E2761"/>
+                </a:solidFill>
+                <a:latin typeface="Calibri" pitchFamily="34" charset="0"/>
+                <a:ea typeface="Calibri" pitchFamily="34" charset="-122"/>
+                <a:cs typeface="Calibri" pitchFamily="34" charset="-120"/>
+              </a:rPr>
+              <a:t>Workflow-graph loop-back (Module 3's conditional edge)</a:t>
+            </a:r>
+            <a:endParaRPr lang="en-US" sz="2000" dirty="0"/>
+          </a:p>
+        </p:txBody>
+      </p:sp>
+      <p:sp>
+        <p:nvSpPr>
+          <p:cNvPr id="10" name="Text 8"/>
+          <p:cNvSpPr/>
+          <p:nvPr/>
+        </p:nvSpPr>
+        <p:spPr>
+          <a:xfrm>
+            <a:off x="4892040" y="1828800"/>
+            <a:ext cx="3639312" cy="2395728"/>
+          </a:xfrm>
+          <a:prstGeom prst="rect">
+            <a:avLst/>
+          </a:prstGeom>
+          <a:noFill/>
+          <a:ln/>
+        </p:spPr>
+        <p:txBody>
+          <a:bodyPr wrap="square" lIns="381" tIns="381" rIns="381" bIns="381" rtlCol="0" anchor="ctr">
+            <a:normAutofit/>
+          </a:bodyPr>
+          <a:lstStyle/>
+          <a:p>
+            <a:pPr marL="342900" indent="-342900">
+              <a:buSzPct val="100000"/>
+              <a:buChar char="•"/>
+            </a:pPr>
+            <a:r>
+              <a:rPr lang="en-US" sz="1300" dirty="0">
+                <a:solidFill>
+                  <a:srgbClr val="212121"/>
+                </a:solidFill>
+                <a:latin typeface="Calibri" pitchFamily="34" charset="0"/>
+                <a:ea typeface="Calibri" pitchFamily="34" charset="-122"/>
+                <a:cs typeface="Calibri" pitchFamily="34" charset="-120"/>
+              </a:rPr>
+              <a:t>Workflow-graph loop-back (Module 3's conditional edge)</a:t>
+            </a:r>
+            <a:endParaRPr lang="en-US" sz="1300" dirty="0"/>
+          </a:p>
+          <a:p>
+            <a:pPr marL="342900" indent="-342900">
+              <a:buSzPct val="100000"/>
+              <a:buChar char="•"/>
+            </a:pPr>
+            <a:r>
+              <a:rPr lang="en-US" sz="1300" dirty="0">
+                <a:solidFill>
+                  <a:srgbClr val="212121"/>
+                </a:solidFill>
+                <a:latin typeface="Calibri" pitchFamily="34" charset="0"/>
+                <a:ea typeface="Calibri" pitchFamily="34" charset="-122"/>
+                <a:cs typeface="Calibri" pitchFamily="34" charset="-120"/>
+              </a:rPr>
+              <a:t>Two different executors — e.g., Critic routing back to Planner</a:t>
+            </a:r>
+            <a:endParaRPr lang="en-US" sz="1300" dirty="0"/>
+          </a:p>
+          <a:p>
+            <a:pPr marL="342900" indent="-342900">
+              <a:buSzPct val="100000"/>
+              <a:buChar char="•"/>
+            </a:pPr>
+            <a:r>
+              <a:rPr lang="en-US" sz="1300" dirty="0">
+                <a:solidFill>
+                  <a:srgbClr val="212121"/>
+                </a:solidFill>
+                <a:latin typeface="Calibri" pitchFamily="34" charset="0"/>
+                <a:ea typeface="Calibri" pitchFamily="34" charset="-122"/>
+                <a:cs typeface="Calibri" pitchFamily="34" charset="-120"/>
+              </a:rPr>
+              <a:t>No automatic cap — track your own counter in workflow state, check it in the condition function</a:t>
+            </a:r>
+            <a:endParaRPr lang="en-US" sz="1300" dirty="0"/>
+          </a:p>
+        </p:txBody>
+      </p:sp>
+      <p:sp>
+        <p:nvSpPr>
+          <p:cNvPr id="11" name="Shape 9"/>
           <p:cNvSpPr/>
           <p:nvPr/>
         </p:nvSpPr>
@@ -2747,7 +2905,7 @@
       </p:sp>
       <p:sp>
         <p:nvSpPr>
-          <p:cNvPr id="7" name="Text 5"/>
+          <p:cNvPr id="12" name="Text 10"/>
           <p:cNvSpPr/>
           <p:nvPr/>
         </p:nvSpPr>
@@ -2780,7 +2938,7 @@
                 <a:ea typeface="Calibri" pitchFamily="34" charset="-122"/>
                 <a:cs typeface="Calibri" pitchFamily="34" charset="-120"/>
               </a:rPr>
-              <a:t>Source: https://learn.microsoft.com/azure/foundry/concepts/evaluation-evaluators/agent-evaluators</a:t>
+              <a:t>Source: https://learn.microsoft.com/en-us/agent-framework/agents/looping  ·  +1 in notes</a:t>
             </a:r>
             <a:endParaRPr lang="en-US" sz="820" dirty="0"/>
           </a:p>
@@ -2914,7 +3072,7 @@
                 <a:ea typeface="Calibri" pitchFamily="34" charset="-122"/>
                 <a:cs typeface="Calibri" pitchFamily="34" charset="-120"/>
               </a:rPr>
-              <a:t>Cost blowouts</a:t>
+              <a:t>Tool storms</a:t>
             </a:r>
             <a:endParaRPr lang="en-US" sz="2800" dirty="0"/>
           </a:p>
@@ -2959,7 +3117,7 @@
                 <a:ea typeface="Calibri" pitchFamily="34" charset="-122"/>
                 <a:cs typeface="Calibri" pitchFamily="34" charset="-120"/>
               </a:rPr>
-              <a:t>The framework's own token-usage telemetry (gen_ai.client.token.usage, gen_ai.usage.input_tokens/output_tokens) is your detection signal — watch it per agent, not just for the workflow as a whole</a:t>
+              <a:t>Tool storm (this workshop's term, not framework vocabulary): an agent makes many more tool calls than the task needs — redundant lookups, retried calls that already succeeded, tool-calling in a loop with no progress</a:t>
             </a:r>
             <a:endParaRPr lang="en-US" sz="1600" dirty="0"/>
           </a:p>
@@ -2980,7 +3138,7 @@
                 <a:ea typeface="Calibri" pitchFamily="34" charset="-122"/>
                 <a:cs typeface="Calibri" pitchFamily="34" charset="-120"/>
               </a:rPr>
-              <a:t>Magentic's max_round_count, max_stall_count, and max_reset_count (Module 2) are a real, shipped example of a built-in cost guardrail — not every pattern has one this explicit</a:t>
+              <a:t>Module 5's Tool Selection evaluator catches unnecessary tool calls directly; Tool Call Accuracy catches redundancy in the calls that were made</a:t>
             </a:r>
             <a:endParaRPr lang="en-US" sz="1600" dirty="0"/>
           </a:p>
@@ -3001,7 +3159,7 @@
                 <a:ea typeface="Calibri" pitchFamily="34" charset="-122"/>
                 <a:cs typeface="Calibri" pitchFamily="34" charset="-120"/>
               </a:rPr>
-              <a:t>For a custom graph, the mitigation is the same as for infinite loops: a bounded counter, checked before the next round starts</a:t>
+              <a:t>A workflow multiplies this risk — a tool storm inside any one agent's turn also inflates every downstream cost metric</a:t>
             </a:r>
             <a:endParaRPr lang="en-US" sz="1600" dirty="0"/>
           </a:p>
@@ -3065,7 +3223,7 @@
                 <a:ea typeface="Calibri" pitchFamily="34" charset="-122"/>
                 <a:cs typeface="Calibri" pitchFamily="34" charset="-120"/>
               </a:rPr>
-              <a:t>Source: https://learn.microsoft.com/en-us/agent-framework/agents/observability  ·  +1 in notes</a:t>
+              <a:t>Source: https://learn.microsoft.com/azure/foundry/concepts/evaluation-evaluators/agent-evaluators</a:t>
             </a:r>
             <a:endParaRPr lang="en-US" sz="820" dirty="0"/>
           </a:p>
@@ -3199,7 +3357,7 @@
                 <a:ea typeface="Calibri" pitchFamily="34" charset="-122"/>
                 <a:cs typeface="Calibri" pitchFamily="34" charset="-120"/>
               </a:rPr>
-              <a:t>Quality drift</a:t>
+              <a:t>Cost blowouts</a:t>
             </a:r>
             <a:endParaRPr lang="en-US" sz="2800" dirty="0"/>
           </a:p>
@@ -3244,7 +3402,7 @@
                 <a:ea typeface="Calibri" pitchFamily="34" charset="-122"/>
                 <a:cs typeface="Calibri" pitchFamily="34" charset="-120"/>
               </a:rPr>
-              <a:t>Quality drift (this workshop's term): a golden-set pass rate that degrades over time, or after a change that looked unrelated</a:t>
+              <a:t>The framework's own token-usage telemetry (gen_ai.client.token.usage, gen_ai.usage.input_tokens/output_tokens) is your detection signal — watch it per agent, not just for the workflow as a whole</a:t>
             </a:r>
             <a:endParaRPr lang="en-US" sz="1600" dirty="0"/>
           </a:p>
@@ -3265,7 +3423,7 @@
                 <a:ea typeface="Calibri" pitchFamily="34" charset="-122"/>
                 <a:cs typeface="Calibri" pitchFamily="34" charset="-120"/>
               </a:rPr>
-              <a:t>Detection is Module 5's own discipline: num_repetitions for run-to-run variance, and the eval → change → re-eval loop for change-induced drift</a:t>
+              <a:t>Magentic's max_round_count, max_stall_count, and max_reset_count (Module 2) are a real, shipped example of a built-in cost guardrail — not every pattern has one this explicit</a:t>
             </a:r>
             <a:endParaRPr lang="en-US" sz="1600" dirty="0"/>
           </a:p>
@@ -3286,7 +3444,7 @@
                 <a:ea typeface="Calibri" pitchFamily="34" charset="-122"/>
                 <a:cs typeface="Calibri" pitchFamily="34" charset="-120"/>
               </a:rPr>
-              <a:t>The earlier a drift shows up in your regression harness, the cheaper it is to fix — this is the argument for running the loop on every change, not just before a release</a:t>
+              <a:t>For a custom graph, the mitigation is the same as for infinite loops: a bounded counter, checked before the next round starts</a:t>
             </a:r>
             <a:endParaRPr lang="en-US" sz="1600" dirty="0"/>
           </a:p>
@@ -3350,7 +3508,7 @@
                 <a:ea typeface="Calibri" pitchFamily="34" charset="-122"/>
                 <a:cs typeface="Calibri" pitchFamily="34" charset="-120"/>
               </a:rPr>
-              <a:t>Source: https://learn.microsoft.com/en-us/agent-framework/agents/evaluation</a:t>
+              <a:t>Source: https://learn.microsoft.com/en-us/agent-framework/agents/observability  ·  +1 in notes</a:t>
             </a:r>
             <a:endParaRPr lang="en-US" sz="820" dirty="0"/>
           </a:p>
@@ -3484,6 +3642,291 @@
                 <a:ea typeface="Calibri" pitchFamily="34" charset="-122"/>
                 <a:cs typeface="Calibri" pitchFamily="34" charset="-120"/>
               </a:rPr>
+              <a:t>Quality drift</a:t>
+            </a:r>
+            <a:endParaRPr lang="en-US" sz="2800" dirty="0"/>
+          </a:p>
+        </p:txBody>
+      </p:sp>
+      <p:sp>
+        <p:nvSpPr>
+          <p:cNvPr id="5" name="Text 3"/>
+          <p:cNvSpPr/>
+          <p:nvPr/>
+        </p:nvSpPr>
+        <p:spPr>
+          <a:xfrm>
+            <a:off x="502920" y="1170432"/>
+            <a:ext cx="7955280" cy="3520440"/>
+          </a:xfrm>
+          <a:prstGeom prst="rect">
+            <a:avLst/>
+          </a:prstGeom>
+          <a:noFill/>
+          <a:ln/>
+        </p:spPr>
+        <p:txBody>
+          <a:bodyPr wrap="square" lIns="0" tIns="0" rIns="0" bIns="0" rtlCol="0" anchor="t">
+            <a:normAutofit/>
+          </a:bodyPr>
+          <a:lstStyle/>
+          <a:p>
+            <a:pPr marL="342900" indent="-342900">
+              <a:spcAft>
+                <a:spcPts val="1000"/>
+              </a:spcAft>
+              <a:buSzPct val="100000"/>
+              <a:buChar char="•"/>
+            </a:pPr>
+            <a:r>
+              <a:rPr lang="en-US" sz="1600" dirty="0">
+                <a:solidFill>
+                  <a:srgbClr val="212121"/>
+                </a:solidFill>
+                <a:latin typeface="Calibri" pitchFamily="34" charset="0"/>
+                <a:ea typeface="Calibri" pitchFamily="34" charset="-122"/>
+                <a:cs typeface="Calibri" pitchFamily="34" charset="-120"/>
+              </a:rPr>
+              <a:t>Quality drift (this workshop's term): a golden-set pass rate that degrades over time, or after a change that looked unrelated</a:t>
+            </a:r>
+            <a:endParaRPr lang="en-US" sz="1600" dirty="0"/>
+          </a:p>
+          <a:p>
+            <a:pPr marL="342900" indent="-342900">
+              <a:spcAft>
+                <a:spcPts val="1000"/>
+              </a:spcAft>
+              <a:buSzPct val="100000"/>
+              <a:buChar char="•"/>
+            </a:pPr>
+            <a:r>
+              <a:rPr lang="en-US" sz="1600" dirty="0">
+                <a:solidFill>
+                  <a:srgbClr val="212121"/>
+                </a:solidFill>
+                <a:latin typeface="Calibri" pitchFamily="34" charset="0"/>
+                <a:ea typeface="Calibri" pitchFamily="34" charset="-122"/>
+                <a:cs typeface="Calibri" pitchFamily="34" charset="-120"/>
+              </a:rPr>
+              <a:t>Detection is Module 5's own discipline: num_repetitions for run-to-run variance, and the eval → change → re-eval loop for change-induced drift</a:t>
+            </a:r>
+            <a:endParaRPr lang="en-US" sz="1600" dirty="0"/>
+          </a:p>
+          <a:p>
+            <a:pPr marL="342900" indent="-342900">
+              <a:spcAft>
+                <a:spcPts val="1000"/>
+              </a:spcAft>
+              <a:buSzPct val="100000"/>
+              <a:buChar char="•"/>
+            </a:pPr>
+            <a:r>
+              <a:rPr lang="en-US" sz="1600" dirty="0">
+                <a:solidFill>
+                  <a:srgbClr val="212121"/>
+                </a:solidFill>
+                <a:latin typeface="Calibri" pitchFamily="34" charset="0"/>
+                <a:ea typeface="Calibri" pitchFamily="34" charset="-122"/>
+                <a:cs typeface="Calibri" pitchFamily="34" charset="-120"/>
+              </a:rPr>
+              <a:t>The earlier a drift shows up in your regression harness, the cheaper it is to fix — this is the argument for running the loop on every change, not just before a release</a:t>
+            </a:r>
+            <a:endParaRPr lang="en-US" sz="1600" dirty="0"/>
+          </a:p>
+        </p:txBody>
+      </p:sp>
+      <p:sp>
+        <p:nvSpPr>
+          <p:cNvPr id="6" name="Shape 4"/>
+          <p:cNvSpPr/>
+          <p:nvPr/>
+        </p:nvSpPr>
+        <p:spPr>
+          <a:xfrm>
+            <a:off x="365760" y="4773168"/>
+            <a:ext cx="8412480" cy="0"/>
+          </a:xfrm>
+          <a:prstGeom prst="line">
+            <a:avLst/>
+          </a:prstGeom>
+          <a:noFill/>
+          <a:ln w="6350">
+            <a:solidFill>
+              <a:srgbClr val="D1D5DB"/>
+            </a:solidFill>
+            <a:prstDash val="solid"/>
+          </a:ln>
+        </p:spPr>
+      </p:sp>
+      <p:sp>
+        <p:nvSpPr>
+          <p:cNvPr id="7" name="Text 5"/>
+          <p:cNvSpPr/>
+          <p:nvPr/>
+        </p:nvSpPr>
+        <p:spPr>
+          <a:xfrm>
+            <a:off x="384048" y="4818888"/>
+            <a:ext cx="8275320" cy="182880"/>
+          </a:xfrm>
+          <a:prstGeom prst="rect">
+            <a:avLst/>
+          </a:prstGeom>
+          <a:noFill/>
+          <a:ln/>
+        </p:spPr>
+        <p:txBody>
+          <a:bodyPr wrap="square" lIns="0" tIns="0" rIns="0" bIns="0" rtlCol="0" anchor="ctr">
+            <a:normAutofit/>
+          </a:bodyPr>
+          <a:lstStyle/>
+          <a:p>
+            <a:pPr indent="0" marL="0">
+              <a:buNone/>
+            </a:pPr>
+            <a:r>
+              <a:rPr lang="en-US" sz="820" dirty="0">
+                <a:solidFill>
+                  <a:srgbClr val="6B7280"/>
+                </a:solidFill>
+                <a:latin typeface="Calibri" pitchFamily="34" charset="0"/>
+                <a:ea typeface="Calibri" pitchFamily="34" charset="-122"/>
+                <a:cs typeface="Calibri" pitchFamily="34" charset="-120"/>
+              </a:rPr>
+              <a:t>Source: https://learn.microsoft.com/en-us/agent-framework/agents/evaluation</a:t>
+            </a:r>
+            <a:endParaRPr lang="en-US" sz="820" dirty="0"/>
+          </a:p>
+        </p:txBody>
+      </p:sp>
+    </p:spTree>
+  </p:cSld>
+  <p:clrMapOvr>
+    <a:masterClrMapping/>
+  </p:clrMapOvr>
+</p:sld>
+</file>
+
+<file path=ppt/slides/slide8.xml><?xml version="1.0" encoding="utf-8"?>
+<p:sld xmlns:a="http://schemas.openxmlformats.org/drawingml/2006/main" xmlns:r="http://schemas.openxmlformats.org/officeDocument/2006/relationships" xmlns:p="http://schemas.openxmlformats.org/presentationml/2006/main">
+  <p:cSld name="Slide 8">
+    <p:bg>
+      <p:bgPr>
+        <a:solidFill>
+          <a:srgbClr val="FFFFFF"/>
+        </a:solidFill>
+      </p:bgPr>
+    </p:bg>
+    <p:spTree>
+      <p:nvGrpSpPr>
+        <p:cNvPr id="1" name=""/>
+        <p:cNvGrpSpPr/>
+        <p:nvPr/>
+      </p:nvGrpSpPr>
+      <p:grpSpPr>
+        <a:xfrm>
+          <a:off x="0" y="0"/>
+          <a:ext cx="0" cy="0"/>
+          <a:chOff x="0" y="0"/>
+          <a:chExt cx="0" cy="0"/>
+        </a:xfrm>
+      </p:grpSpPr>
+      <p:sp>
+        <p:nvSpPr>
+          <p:cNvPr id="2" name="Shape 0"/>
+          <p:cNvSpPr/>
+          <p:nvPr/>
+        </p:nvSpPr>
+        <p:spPr>
+          <a:xfrm>
+            <a:off x="0" y="0"/>
+            <a:ext cx="54864" cy="5143500"/>
+          </a:xfrm>
+          <a:prstGeom prst="rect">
+            <a:avLst/>
+          </a:prstGeom>
+          <a:solidFill>
+            <a:srgbClr val="1E2761"/>
+          </a:solidFill>
+          <a:ln/>
+        </p:spPr>
+      </p:sp>
+      <p:sp>
+        <p:nvSpPr>
+          <p:cNvPr id="3" name="Text 1"/>
+          <p:cNvSpPr/>
+          <p:nvPr/>
+        </p:nvSpPr>
+        <p:spPr>
+          <a:xfrm>
+            <a:off x="5486400" y="256032"/>
+            <a:ext cx="3337560" cy="228600"/>
+          </a:xfrm>
+          <a:prstGeom prst="rect">
+            <a:avLst/>
+          </a:prstGeom>
+          <a:noFill/>
+          <a:ln/>
+        </p:spPr>
+        <p:txBody>
+          <a:bodyPr wrap="square" lIns="0" tIns="0" rIns="0" bIns="0" rtlCol="0" anchor="ctr">
+            <a:normAutofit/>
+          </a:bodyPr>
+          <a:lstStyle/>
+          <a:p>
+            <a:pPr algn="r" indent="0" marL="0">
+              <a:buNone/>
+            </a:pPr>
+            <a:r>
+              <a:rPr lang="en-US" sz="950" dirty="0">
+                <a:solidFill>
+                  <a:srgbClr val="6B7280"/>
+                </a:solidFill>
+                <a:latin typeface="Calibri" pitchFamily="34" charset="0"/>
+                <a:ea typeface="Calibri" pitchFamily="34" charset="-122"/>
+                <a:cs typeface="Calibri" pitchFamily="34" charset="-120"/>
+              </a:rPr>
+              <a:t>Day 4 · Module 6</a:t>
+            </a:r>
+            <a:endParaRPr lang="en-US" sz="950" dirty="0"/>
+          </a:p>
+        </p:txBody>
+      </p:sp>
+      <p:sp>
+        <p:nvSpPr>
+          <p:cNvPr id="4" name="Text 2"/>
+          <p:cNvSpPr/>
+          <p:nvPr/>
+        </p:nvSpPr>
+        <p:spPr>
+          <a:xfrm>
+            <a:off x="365760" y="310896"/>
+            <a:ext cx="6583680" cy="603504"/>
+          </a:xfrm>
+          <a:prstGeom prst="rect">
+            <a:avLst/>
+          </a:prstGeom>
+          <a:noFill/>
+          <a:ln/>
+        </p:spPr>
+        <p:txBody>
+          <a:bodyPr wrap="square" lIns="0" tIns="0" rIns="0" bIns="0" rtlCol="0" anchor="ctr">
+            <a:normAutofit/>
+          </a:bodyPr>
+          <a:lstStyle/>
+          <a:p>
+            <a:pPr indent="0" marL="0">
+              <a:buNone/>
+            </a:pPr>
+            <a:r>
+              <a:rPr lang="en-US" sz="2800" b="1" dirty="0">
+                <a:solidFill>
+                  <a:srgbClr val="1E2761"/>
+                </a:solidFill>
+                <a:latin typeface="Calibri" pitchFamily="34" charset="0"/>
+                <a:ea typeface="Calibri" pitchFamily="34" charset="-122"/>
+                <a:cs typeface="Calibri" pitchFamily="34" charset="-120"/>
+              </a:rPr>
               <a:t>Guardrails, by failure mode</a:t>
             </a:r>
             <a:endParaRPr lang="en-US" sz="2800" dirty="0"/>
@@ -3492,7 +3935,7 @@
       </p:sp>
       <p:graphicFrame>
         <p:nvGraphicFramePr>
-          <p:cNvPr id="8" name="Table 0"/>
+          <p:cNvPr id="9" name="Table 0"/>
           <p:cNvGraphicFramePr>
             <a:graphicFrameLocks noGrp="1"/>
           </p:cNvGraphicFramePr>
@@ -4829,9 +5272,9 @@
 </p:sld>
 </file>
 
-<file path=ppt/slides/slide8.xml><?xml version="1.0" encoding="utf-8"?>
+<file path=ppt/slides/slide9.xml><?xml version="1.0" encoding="utf-8"?>
 <p:sld xmlns:a="http://schemas.openxmlformats.org/drawingml/2006/main" xmlns:r="http://schemas.openxmlformats.org/officeDocument/2006/relationships" xmlns:p="http://schemas.openxmlformats.org/presentationml/2006/main">
-  <p:cSld name="Slide 8">
+  <p:cSld name="Slide 9">
     <p:bg>
       <p:bgPr>
         <a:solidFill>
